--- a/KAYA_Boreal_Presentation.pptx
+++ b/KAYA_Boreal_Presentation.pptx
@@ -3174,14 +3174,14 @@
           </a:p>
           <a:p>
             <a:pPr>
-              <a:defRPr sz="3600" b="1">
+              <a:defRPr sz="3400" b="1">
                 <a:solidFill>
                   <a:srgbClr val="FFFFFF"/>
                 </a:solidFill>
               </a:defRPr>
             </a:pPr>
             <a:r>
-              <a:t>Entrepôt de Données &amp; Dashboard Décisionnel</a:t>
+              <a:t>Construire la Chaîne de Données et Analyser le Portefeuille</a:t>
             </a:r>
           </a:p>
           <a:p>
@@ -3193,7 +3193,7 @@
               </a:defRPr>
             </a:pPr>
             <a:r>
-              <a:t>Soutenance du Projet Boréal</a:t>
+              <a:t>Soutenance de Projet</a:t>
             </a:r>
           </a:p>
           <a:p>
@@ -3278,7 +3278,7 @@
               </a:defRPr>
             </a:pPr>
             <a:r>
-              <a:t>BORÉAL ASSURANCES — SOUTENANCE</a:t>
+              <a:t>BORÉAL ASSURANCES — DASHBOARD ANALYTICS</a:t>
             </a:r>
           </a:p>
           <a:p>
@@ -3290,7 +3290,7 @@
               </a:defRPr>
             </a:pPr>
             <a:r>
-              <a:t>1. Contexte &amp; Enjeux Business</a:t>
+              <a:t>1. Architecture sous DuckDB (Détail des Couches)</a:t>
             </a:r>
           </a:p>
         </p:txBody>
@@ -3303,14 +3303,14 @@
         </p:nvSpPr>
         <p:spPr>
           <a:xfrm>
-            <a:off x="731520" y="1645920"/>
-            <a:ext cx="3291840" cy="4572000"/>
+            <a:off x="731520" y="1371600"/>
+            <a:ext cx="10728655" cy="1508760"/>
           </a:xfrm>
           <a:prstGeom prst="roundRect">
             <a:avLst/>
           </a:prstGeom>
           <a:solidFill>
-            <a:srgbClr val="EEF2FF"/>
+            <a:srgbClr val="FFFFFF"/>
           </a:solidFill>
           <a:ln>
             <a:solidFill>
@@ -3333,39 +3333,38 @@
           </a:fontRef>
         </p:style>
         <p:txBody>
-          <a:bodyPr rtlCol="0" anchor="ctr" wrap="square" lIns="228600" rIns="228600" tIns="274320"/>
+          <a:bodyPr rtlCol="0" anchor="ctr" wrap="square" lIns="274320" tIns="137160"/>
           <a:lstStyle/>
           <a:p>
             <a:pPr algn="ctr">
-              <a:defRPr sz="1800" b="1">
+              <a:defRPr sz="1600" b="1">
                 <a:solidFill>
                   <a:srgbClr val="0F172A"/>
                 </a:solidFill>
               </a:defRPr>
             </a:pPr>
             <a:r>
-              <a:t>Problématique</a:t>
-            </a:r>
-          </a:p>
-          <a:p>
+              <a:t>🟤 Couche RAW (Brute)  —  Ingestion Multi-Sources</a:t>
+            </a:r>
+          </a:p>
+          <a:p>
+            <a:pPr>
+              <a:defRPr sz="1200">
+                <a:solidFill>
+                  <a:srgbClr val="1E293B"/>
+                </a:solidFill>
+              </a:defRPr>
+            </a:pPr>
+            <a:r>
+              <a:t>• Stockage initial sans altération des fichiers CSV &amp; Parquet.</a:t>
+            </a:r>
             <a:br/>
-            <a:pPr>
-              <a:defRPr sz="1300">
-                <a:solidFill>
-                  <a:srgbClr val="1E293B"/>
-                </a:solidFill>
-              </a:defRPr>
-            </a:pPr>
-            <a:r>
-              <a:t>• Multiplicité des sources (CRM, Contrats, Sinistres, 64 Règlements).</a:t>
+            <a:r>
+              <a:t>• Ingestion automatisée du CRM, Contrats, Sinistres et des 64 fichiers de règlements mensuels.</a:t>
             </a:r>
             <a:br/>
             <a:r>
-              <a:t>• Présence d'anomalies de saisie (primes &lt;= 0, incohérences de dates).</a:t>
-            </a:r>
-            <a:br/>
-            <a:r>
-              <a:t>• Reporting manuel lourd et risqué.</a:t>
+              <a:t>• Conservation de l'historique brut pour audit et traçabilité.</a:t>
             </a:r>
           </a:p>
         </p:txBody>
@@ -3378,14 +3377,14 @@
         </p:nvSpPr>
         <p:spPr>
           <a:xfrm>
-            <a:off x="4297680" y="1645920"/>
-            <a:ext cx="3291840" cy="4572000"/>
+            <a:off x="731520" y="3063240"/>
+            <a:ext cx="10728655" cy="1508760"/>
           </a:xfrm>
           <a:prstGeom prst="roundRect">
             <a:avLst/>
           </a:prstGeom>
           <a:solidFill>
-            <a:srgbClr val="EEF2FF"/>
+            <a:srgbClr val="FFFFFF"/>
           </a:solidFill>
           <a:ln>
             <a:solidFill>
@@ -3408,39 +3407,38 @@
           </a:fontRef>
         </p:style>
         <p:txBody>
-          <a:bodyPr rtlCol="0" anchor="ctr" wrap="square" lIns="228600" rIns="228600" tIns="274320"/>
+          <a:bodyPr rtlCol="0" anchor="ctr" wrap="square" lIns="274320" tIns="137160"/>
           <a:lstStyle/>
           <a:p>
             <a:pPr algn="ctr">
-              <a:defRPr sz="1800" b="1">
+              <a:defRPr sz="1600" b="1">
                 <a:solidFill>
                   <a:srgbClr val="0F172A"/>
                 </a:solidFill>
               </a:defRPr>
             </a:pPr>
             <a:r>
-              <a:t>Objectifs Techniques</a:t>
-            </a:r>
-          </a:p>
-          <a:p>
+              <a:t>⚪ Couche PREP (Qualité)  —  Nettoyage &amp; Quarantaine</a:t>
+            </a:r>
+          </a:p>
+          <a:p>
+            <a:pPr>
+              <a:defRPr sz="1200">
+                <a:solidFill>
+                  <a:srgbClr val="1E293B"/>
+                </a:solidFill>
+              </a:defRPr>
+            </a:pPr>
+            <a:r>
+              <a:t>• Application dynamique des 15 règles de gestion (R01 à R15).</a:t>
+            </a:r>
             <a:br/>
-            <a:pPr>
-              <a:defRPr sz="1300">
-                <a:solidFill>
-                  <a:srgbClr val="1E293B"/>
-                </a:solidFill>
-              </a:defRPr>
-            </a:pPr>
-            <a:r>
-              <a:t>• Unifier les flux dans DuckDB (Architecture Médaillon).</a:t>
+            <a:r>
+              <a:t>• Isolation automatique en table prep.quarantaine (87 lignes isolées au dernier run).</a:t>
             </a:r>
             <a:br/>
             <a:r>
-              <a:t>• Automatiser les contrôles qualité (Quarantaine R01-R15).</a:t>
-            </a:r>
-            <a:br/>
-            <a:r>
-              <a:t>• Reconstitution instantanée et reproductible du DWH.</a:t>
+              <a:t>• Typage fort des colonnes, dédoublonnage et validation chronologique.</a:t>
             </a:r>
           </a:p>
         </p:txBody>
@@ -3453,14 +3451,14 @@
         </p:nvSpPr>
         <p:spPr>
           <a:xfrm>
-            <a:off x="7863840" y="1645920"/>
-            <a:ext cx="3291840" cy="4572000"/>
+            <a:off x="731520" y="4754880"/>
+            <a:ext cx="10728655" cy="1508760"/>
           </a:xfrm>
           <a:prstGeom prst="roundRect">
             <a:avLst/>
           </a:prstGeom>
           <a:solidFill>
-            <a:srgbClr val="EEF2FF"/>
+            <a:srgbClr val="FFFFFF"/>
           </a:solidFill>
           <a:ln>
             <a:solidFill>
@@ -3483,39 +3481,38 @@
           </a:fontRef>
         </p:style>
         <p:txBody>
-          <a:bodyPr rtlCol="0" anchor="ctr" wrap="square" lIns="228600" rIns="228600" tIns="274320"/>
+          <a:bodyPr rtlCol="0" anchor="ctr" wrap="square" lIns="274320" tIns="137160"/>
           <a:lstStyle/>
           <a:p>
             <a:pPr algn="ctr">
-              <a:defRPr sz="1800" b="1">
+              <a:defRPr sz="1600" b="1">
                 <a:solidFill>
                   <a:srgbClr val="0F172A"/>
                 </a:solidFill>
               </a:defRPr>
             </a:pPr>
             <a:r>
-              <a:t>Impact Business</a:t>
-            </a:r>
-          </a:p>
-          <a:p>
+              <a:t>🟡 Couche DWH (Entrepôt)  —  Modélisation en Étoile (Kimball)</a:t>
+            </a:r>
+          </a:p>
+          <a:p>
+            <a:pPr>
+              <a:defRPr sz="1200">
+                <a:solidFill>
+                  <a:srgbClr val="1E293B"/>
+                </a:solidFill>
+              </a:defRPr>
+            </a:pPr>
+            <a:r>
+              <a:t>• Création du schéma dimensionnel optimisé sous DuckDB.</a:t>
+            </a:r>
             <a:br/>
-            <a:pPr>
-              <a:defRPr sz="1300">
-                <a:solidFill>
-                  <a:srgbClr val="1E293B"/>
-                </a:solidFill>
-              </a:defRPr>
-            </a:pPr>
-            <a:r>
-              <a:t>• Vision 360° du portefeuille et du ratio S/P.</a:t>
+            <a:r>
+              <a:t>• Table de faits (20 109 faits contrats actifs, sinistres, règlements) &amp; Dimensions.</a:t>
             </a:r>
             <a:br/>
             <a:r>
-              <a:t>• Identification des clients clés (Analyse de Pareto).</a:t>
-            </a:r>
-            <a:br/>
-            <a:r>
-              <a:t>• Dashboard interactif Streamlit pour le pilotage.</a:t>
+              <a:t>• Utilisation de clés substitutives (SK) et alimentation haute performance (&lt;100ms).</a:t>
             </a:r>
           </a:p>
         </p:txBody>
@@ -3587,7 +3584,7 @@
               </a:defRPr>
             </a:pPr>
             <a:r>
-              <a:t>BORÉAL ASSURANCES — SOUTENANCE</a:t>
+              <a:t>BORÉAL ASSURANCES — DASHBOARD ANALYTICS</a:t>
             </a:r>
           </a:p>
           <a:p>
@@ -3599,7 +3596,7 @@
               </a:defRPr>
             </a:pPr>
             <a:r>
-              <a:t>2. Architecture Médaillon sous DuckDB</a:t>
+              <a:t>Indicateurs Clés</a:t>
             </a:r>
           </a:p>
         </p:txBody>
@@ -3612,8 +3609,8 @@
         </p:nvSpPr>
         <p:spPr>
           <a:xfrm>
-            <a:off x="731520" y="1463040"/>
-            <a:ext cx="10728655" cy="1371600"/>
+            <a:off x="731520" y="1645920"/>
+            <a:ext cx="3291840" cy="4572000"/>
           </a:xfrm>
           <a:prstGeom prst="roundRect">
             <a:avLst/>
@@ -3642,38 +3639,39 @@
           </a:fontRef>
         </p:style>
         <p:txBody>
-          <a:bodyPr rtlCol="0" anchor="ctr" wrap="square" lIns="274320"/>
+          <a:bodyPr rtlCol="0" anchor="ctr" wrap="square" lIns="228600"/>
           <a:lstStyle/>
           <a:p>
             <a:pPr algn="ctr">
-              <a:defRPr sz="1600" b="1">
+              <a:defRPr sz="1700" b="1">
                 <a:solidFill>
                   <a:srgbClr val="0F172A"/>
                 </a:solidFill>
               </a:defRPr>
             </a:pPr>
             <a:r>
-              <a:t>🟤 Couche RAW  —  Ingestion Brute</a:t>
-            </a:r>
-          </a:p>
-          <a:p>
+              <a:t>Volume &amp; Contrats</a:t>
+            </a:r>
+          </a:p>
+          <a:p>
+            <a:br/>
             <a:pPr>
-              <a:defRPr sz="1200">
+              <a:defRPr sz="1300">
                 <a:solidFill>
                   <a:srgbClr val="1E293B"/>
                 </a:solidFill>
               </a:defRPr>
             </a:pPr>
             <a:r>
-              <a:t>• Stockage des fichiers sources CSV &amp; Parquet.</a:t>
+              <a:t>• Contrats Actifs : 20 109[cite: 5]</a:t>
             </a:r>
             <a:br/>
             <a:r>
-              <a:t>• Conservation de l'historique sans altération.</a:t>
+              <a:t>• Taux de Résiliation : 32.5% (Alerte attrition)[cite: 5]</a:t>
             </a:r>
             <a:br/>
             <a:r>
-              <a:t>• Ingestion rapide de 64 fichiers de règlements.</a:t>
+              <a:t>• Fréquence des sinistres : 20.1%[cite: 5]</a:t>
             </a:r>
           </a:p>
         </p:txBody>
@@ -3686,8 +3684,8 @@
         </p:nvSpPr>
         <p:spPr>
           <a:xfrm>
-            <a:off x="731520" y="3108960"/>
-            <a:ext cx="10728655" cy="1371600"/>
+            <a:off x="4297680" y="1645920"/>
+            <a:ext cx="3291840" cy="4572000"/>
           </a:xfrm>
           <a:prstGeom prst="roundRect">
             <a:avLst/>
@@ -3716,38 +3714,39 @@
           </a:fontRef>
         </p:style>
         <p:txBody>
-          <a:bodyPr rtlCol="0" anchor="ctr" wrap="square" lIns="274320"/>
+          <a:bodyPr rtlCol="0" anchor="ctr" wrap="square" lIns="228600"/>
           <a:lstStyle/>
           <a:p>
             <a:pPr algn="ctr">
-              <a:defRPr sz="1600" b="1">
+              <a:defRPr sz="1700" b="1">
                 <a:solidFill>
                   <a:srgbClr val="0F172A"/>
                 </a:solidFill>
               </a:defRPr>
             </a:pPr>
             <a:r>
-              <a:t>⚪ Couche PREP  —  Qualité &amp; Nettoyage</a:t>
-            </a:r>
-          </a:p>
-          <a:p>
+              <a:t>Alerte Rentabilité</a:t>
+            </a:r>
+          </a:p>
+          <a:p>
+            <a:br/>
             <a:pPr>
-              <a:defRPr sz="1200">
+              <a:defRPr sz="1300">
                 <a:solidFill>
                   <a:srgbClr val="1E293B"/>
                 </a:solidFill>
               </a:defRPr>
             </a:pPr>
             <a:r>
-              <a:t>• Application dynamique des règles R01 à R15.</a:t>
+              <a:t>• Ratio S/P Global : 333.0%[cite: 5]</a:t>
             </a:r>
             <a:br/>
             <a:r>
-              <a:t>• Isolation automatique en table prep.quarantaine.</a:t>
+              <a:t>• Seuil d'équilibre critique dépassé (objectif &lt; 70%)[cite: 5].</a:t>
             </a:r>
             <a:br/>
             <a:r>
-              <a:t>• Typage fort et dédoublonnage.</a:t>
+              <a:t>• Coût Moyen par sinistre : 7 309 €[cite: 5].</a:t>
             </a:r>
           </a:p>
         </p:txBody>
@@ -3760,8 +3759,8 @@
         </p:nvSpPr>
         <p:spPr>
           <a:xfrm>
-            <a:off x="731520" y="4754880"/>
-            <a:ext cx="10728655" cy="1371600"/>
+            <a:off x="7863840" y="1645920"/>
+            <a:ext cx="3291840" cy="4572000"/>
           </a:xfrm>
           <a:prstGeom prst="roundRect">
             <a:avLst/>
@@ -3790,38 +3789,39 @@
           </a:fontRef>
         </p:style>
         <p:txBody>
-          <a:bodyPr rtlCol="0" anchor="ctr" wrap="square" lIns="274320"/>
+          <a:bodyPr rtlCol="0" anchor="ctr" wrap="square" lIns="228600"/>
           <a:lstStyle/>
           <a:p>
             <a:pPr algn="ctr">
-              <a:defRPr sz="1600" b="1">
+              <a:defRPr sz="1700" b="1">
                 <a:solidFill>
                   <a:srgbClr val="0F172A"/>
                 </a:solidFill>
               </a:defRPr>
             </a:pPr>
             <a:r>
-              <a:t>🟡 Couche DWH  —  Modèle en Étoile</a:t>
-            </a:r>
-          </a:p>
-          <a:p>
+              <a:t>Pipeline Data</a:t>
+            </a:r>
+          </a:p>
+          <a:p>
+            <a:br/>
             <a:pPr>
-              <a:defRPr sz="1200">
+              <a:defRPr sz="1300">
                 <a:solidFill>
                   <a:srgbClr val="1E293B"/>
                 </a:solidFill>
               </a:defRPr>
             </a:pPr>
             <a:r>
-              <a:t>• Schéma dimensionnel de Kimball.</a:t>
+              <a:t>• Moteur DuckDB + Streamlit.</a:t>
             </a:r>
             <a:br/>
             <a:r>
-              <a:t>• Table de faits (contrats, sinistres, règlements).</a:t>
+              <a:t>• 87 anomalies isolées en quarantaine.</a:t>
             </a:r>
             <a:br/>
             <a:r>
-              <a:t>• Clés substitutives (SK) et performances DuckDB.</a:t>
+              <a:t>• Traitement robuste et non bloquant.</a:t>
             </a:r>
           </a:p>
         </p:txBody>
@@ -3893,7 +3893,7 @@
               </a:defRPr>
             </a:pPr>
             <a:r>
-              <a:t>BORÉAL ASSURANCES — SOUTENANCE</a:t>
+              <a:t>BORÉAL ASSURANCES — DASHBOARD ANALYTICS</a:t>
             </a:r>
           </a:p>
           <a:p>
@@ -3905,95 +3905,35 @@
               </a:defRPr>
             </a:pPr>
             <a:r>
-              <a:t>3. Contrôle Qualité &amp; Bilan Quarantaine</a:t>
-            </a:r>
-          </a:p>
-        </p:txBody>
-      </p:sp>
-      <p:sp>
-        <p:nvSpPr>
-          <p:cNvPr id="3" name="Rounded Rectangle 2"/>
-          <p:cNvSpPr/>
+              <a:t>3. Segmentation Technique : Ratio S/P par Tranche d'Âge</a:t>
+            </a:r>
+          </a:p>
+        </p:txBody>
+      </p:sp>
+      <p:pic>
+        <p:nvPicPr>
+          <p:cNvPr id="3" name="Picture 2" descr="chart_sp_age.png"/>
+          <p:cNvPicPr>
+            <a:picLocks noChangeAspect="1"/>
+          </p:cNvPicPr>
           <p:nvPr/>
-        </p:nvSpPr>
+        </p:nvPicPr>
+        <p:blipFill>
+          <a:blip r:embed="rId2"/>
+          <a:stretch>
+            <a:fillRect/>
+          </a:stretch>
+        </p:blipFill>
         <p:spPr>
           <a:xfrm>
             <a:off x="731520" y="1463040"/>
-            <a:ext cx="5486400" cy="4754880"/>
+            <a:ext cx="5303520" cy="3358896"/>
           </a:xfrm>
-          <a:prstGeom prst="roundRect">
+          <a:prstGeom prst="rect">
             <a:avLst/>
           </a:prstGeom>
-          <a:solidFill>
-            <a:srgbClr val="FFFFFF"/>
-          </a:solidFill>
-          <a:ln>
-            <a:solidFill>
-              <a:srgbClr val="2563EB"/>
-            </a:solidFill>
-          </a:ln>
         </p:spPr>
-        <p:style>
-          <a:lnRef idx="1">
-            <a:schemeClr val="accent1"/>
-          </a:lnRef>
-          <a:fillRef idx="3">
-            <a:schemeClr val="accent1"/>
-          </a:fillRef>
-          <a:effectRef idx="2">
-            <a:schemeClr val="accent1"/>
-          </a:effectRef>
-          <a:fontRef idx="minor">
-            <a:schemeClr val="lt1"/>
-          </a:fontRef>
-        </p:style>
-        <p:txBody>
-          <a:bodyPr rtlCol="0" anchor="ctr" wrap="square" lIns="274320"/>
-          <a:lstStyle/>
-          <a:p>
-            <a:pPr algn="ctr">
-              <a:defRPr sz="1800" b="1">
-                <a:solidFill>
-                  <a:srgbClr val="0F172A"/>
-                </a:solidFill>
-              </a:defRPr>
-            </a:pPr>
-            <a:r>
-              <a:t>Règles de Validation (R01 à R15)</a:t>
-            </a:r>
-          </a:p>
-          <a:p>
-            <a:br/>
-            <a:pPr>
-              <a:defRPr sz="1300">
-                <a:solidFill>
-                  <a:srgbClr val="1E293B"/>
-                </a:solidFill>
-              </a:defRPr>
-            </a:pPr>
-            <a:r>
-              <a:t>• R05 : Primes annuelles &lt;= 0€ (Rejeté)</a:t>
-            </a:r>
-            <a:br/>
-            <a:r>
-              <a:t>• R06 : Date résiliation &lt; Date effet</a:t>
-            </a:r>
-            <a:br/>
-            <a:r>
-              <a:t>• R10 : Date déclaration &lt; Date survenance</a:t>
-            </a:r>
-            <a:br/>
-            <a:r>
-              <a:t>• R11/R15 : Sinistres ou règlements orphelins (sans contrat)</a:t>
-            </a:r>
-            <a:br/>
-            <a:br/>
-            <a:r>
-              <a:t>--&gt; Mécanisme non bloquant : Le pipeline continue d'alimenter le DWH avec les lignes valides.</a:t>
-            </a:r>
-          </a:p>
-        </p:txBody>
-      </p:sp>
+      </p:pic>
       <p:sp>
         <p:nvSpPr>
           <p:cNvPr id="4" name="Rounded Rectangle 3"/>
@@ -4002,8 +3942,8 @@
         </p:nvSpPr>
         <p:spPr>
           <a:xfrm>
-            <a:off x="6583680" y="1463040"/>
-            <a:ext cx="4876495" cy="4754880"/>
+            <a:off x="6309360" y="1463040"/>
+            <a:ext cx="5120640" cy="4754880"/>
           </a:xfrm>
           <a:prstGeom prst="roundRect">
             <a:avLst/>
@@ -4043,20 +3983,7 @@
               </a:defRPr>
             </a:pPr>
             <a:r>
-              <a:t>Bilan du Dernier Execution</a:t>
-            </a:r>
-          </a:p>
-          <a:p>
-            <a:br/>
-            <a:pPr>
-              <a:defRPr sz="2800" b="1">
-                <a:solidFill>
-                  <a:srgbClr val="2563EB"/>
-                </a:solidFill>
-              </a:defRPr>
-            </a:pPr>
-            <a:r>
-              <a:t>87 Lignes en Quarantaine</a:t>
+              <a:t>Analyse:</a:t>
             </a:r>
           </a:p>
           <a:p>
@@ -4069,28 +3996,17 @@
               </a:defRPr>
             </a:pPr>
             <a:r>
-              <a:t>- R05 (Primes invalides) : 25 lignes</a:t>
-            </a:r>
-            <a:br/>
-            <a:r>
-              <a:t>- R15 (Règlements orphelins) : 22 lignes</a:t>
-            </a:r>
-            <a:br/>
-            <a:r>
-              <a:t>- R06 (Dates contrats) : 20 lignes</a:t>
-            </a:r>
-            <a:br/>
-            <a:r>
-              <a:t>- R10 (Dates sinistres) : 15 lignes</a:t>
-            </a:r>
-            <a:br/>
-            <a:r>
-              <a:t>- R11 (Sinistres orphelins) : 5 lignes</a:t>
+              <a:t>• Déséquilibre Global : Tous les segments affichent des ratios S/P supérieurs à 200%[cite: 7].</a:t>
             </a:r>
             <a:br/>
             <a:br/>
             <a:r>
-              <a:t>Conformité Globale : 99.4%</a:t>
+              <a:t>• Pic Critique : La tranche 36-50 ans atteint un ratio record de 469.85%[cite: 7].</a:t>
+            </a:r>
+            <a:br/>
+            <a:br/>
+            <a:r>
+              <a:t>• Action Métier : Refonte tarifaire globale requise pour redresser la marge sur l'ensemble du portefeuille[cite: 7].</a:t>
             </a:r>
           </a:p>
         </p:txBody>
@@ -4162,7 +4078,7 @@
               </a:defRPr>
             </a:pPr>
             <a:r>
-              <a:t>BORÉAL ASSURANCES — SOUTENANCE</a:t>
+              <a:t>BORÉAL ASSURANCES — DASHBOARD ANALYTICS</a:t>
             </a:r>
           </a:p>
           <a:p>
@@ -4174,31 +4090,55 @@
               </a:defRPr>
             </a:pPr>
             <a:r>
-              <a:t>4. Démonstration Live : Pipeline ETL Orchestré</a:t>
-            </a:r>
-          </a:p>
-        </p:txBody>
-      </p:sp>
-      <p:sp>
-        <p:nvSpPr>
-          <p:cNvPr id="3" name="Rounded Rectangle 2"/>
+              <a:t>4. Performance Opérationnelle : Délais de Gestion</a:t>
+            </a:r>
+          </a:p>
+        </p:txBody>
+      </p:sp>
+      <p:pic>
+        <p:nvPicPr>
+          <p:cNvPr id="3" name="Picture 2" descr="chart_delais_dashboard.png"/>
+          <p:cNvPicPr>
+            <a:picLocks noChangeAspect="1"/>
+          </p:cNvPicPr>
+          <p:nvPr/>
+        </p:nvPicPr>
+        <p:blipFill>
+          <a:blip r:embed="rId2"/>
+          <a:stretch>
+            <a:fillRect/>
+          </a:stretch>
+        </p:blipFill>
+        <p:spPr>
+          <a:xfrm>
+            <a:off x="731520" y="1463040"/>
+            <a:ext cx="5303520" cy="3358896"/>
+          </a:xfrm>
+          <a:prstGeom prst="rect">
+            <a:avLst/>
+          </a:prstGeom>
+        </p:spPr>
+      </p:pic>
+      <p:sp>
+        <p:nvSpPr>
+          <p:cNvPr id="4" name="Rounded Rectangle 3"/>
           <p:cNvSpPr/>
           <p:nvPr/>
         </p:nvSpPr>
         <p:spPr>
           <a:xfrm>
-            <a:off x="731520" y="1645920"/>
-            <a:ext cx="10728655" cy="4389120"/>
+            <a:off x="6309360" y="1463040"/>
+            <a:ext cx="5120640" cy="4754880"/>
           </a:xfrm>
           <a:prstGeom prst="roundRect">
             <a:avLst/>
           </a:prstGeom>
           <a:solidFill>
-            <a:srgbClr val="0F172A"/>
+            <a:srgbClr val="FFFFFF"/>
           </a:solidFill>
           <a:ln>
             <a:solidFill>
-              <a:srgbClr val="0F172A"/>
+              <a:srgbClr val="2563EB"/>
             </a:solidFill>
           </a:ln>
         </p:spPr>
@@ -4217,60 +4157,49 @@
           </a:fontRef>
         </p:style>
         <p:txBody>
-          <a:bodyPr rtlCol="0" anchor="ctr" wrap="square" lIns="457200"/>
+          <a:bodyPr rtlCol="0" anchor="ctr" wrap="square" lIns="274320"/>
           <a:lstStyle/>
           <a:p>
             <a:pPr algn="ctr">
-              <a:defRPr sz="1600">
-                <a:solidFill>
-                  <a:srgbClr val="10B981"/>
+              <a:defRPr sz="1800" b="1">
+                <a:solidFill>
+                  <a:srgbClr val="0F172A"/>
                 </a:solidFill>
               </a:defRPr>
             </a:pPr>
             <a:r>
-              <a:t>&gt; Executing Live Demonstration in Terminal...</a:t>
+              <a:t>Analyse des Délais (Gouvernance) :</a:t>
             </a:r>
           </a:p>
           <a:p>
             <a:br/>
             <a:pPr>
-              <a:defRPr sz="2200" b="1">
-                <a:solidFill>
-                  <a:srgbClr val="FFFFFF"/>
+              <a:defRPr sz="1300">
+                <a:solidFill>
+                  <a:srgbClr val="1E293B"/>
                 </a:solidFill>
               </a:defRPr>
             </a:pPr>
             <a:r>
-              <a:t>Commande exécutée :</a:t>
+              <a:t>• Réactivité Standard : Médiane homogène entre 4 et 6 jours[cite: 10].</a:t>
             </a:r>
             <a:br/>
-            <a:r>
-              <a:t>python scripts/run_pipeline.py</a:t>
-            </a:r>
-          </a:p>
-          <a:p>
             <a:br/>
-            <a:pPr>
-              <a:defRPr sz="1500">
-                <a:solidFill>
-                  <a:srgbClr val="E2E8F0"/>
-                </a:solidFill>
-              </a:defRPr>
-            </a:pPr>
-            <a:r>
-              <a:t>Étape 1 : Ingestion Raw (01_ingest_raw.py) --&gt; [OK]</a:t>
+            <a:r>
+              <a:t>• Goulots d'étranglement (P90) :</a:t>
             </a:r>
             <a:br/>
             <a:r>
-              <a:t>Étape 2 : Qualité &amp; Quarantaine (02_quality_prep.py) --&gt; 87 isolés</a:t>
+              <a:t>  - VOL : 25 jours[cite: 10]</a:t>
             </a:r>
             <a:br/>
             <a:r>
-              <a:t>Étape 3 : Alimentation DWH (02_schema.py) --&gt; 20 109 faits contrats</a:t>
+              <a:t>  - INCENDIE : 23 jours[cite: 10]</a:t>
             </a:r>
             <a:br/>
-            <a:r>
-              <a:t>Étape 4 : Génération Pareto (04_valeur_clients.py) --&gt; Graphique généré</a:t>
+            <a:br/>
+            <a:r>
+              <a:t>• Recommandation : Digitaliser l'instruction des dossiers complexes pour réduire le P90.</a:t>
             </a:r>
           </a:p>
         </p:txBody>
@@ -4342,7 +4271,7 @@
               </a:defRPr>
             </a:pPr>
             <a:r>
-              <a:t>BORÉAL ASSURANCES — SOUTENANCE</a:t>
+              <a:t>BORÉAL ASSURANCES — DASHBOARD ANALYTICS</a:t>
             </a:r>
           </a:p>
           <a:p>
@@ -4354,7 +4283,7 @@
               </a:defRPr>
             </a:pPr>
             <a:r>
-              <a:t>5. Démonstration Live : Dashboard Streamlit</a:t>
+              <a:t>5. Recommandations Décisionnelles &amp; Plan d'Action</a:t>
             </a:r>
           </a:p>
         </p:txBody>
@@ -4367,14 +4296,14 @@
         </p:nvSpPr>
         <p:spPr>
           <a:xfrm>
-            <a:off x="731520" y="1645920"/>
-            <a:ext cx="3291840" cy="4572000"/>
+            <a:off x="731520" y="1463040"/>
+            <a:ext cx="10728655" cy="1371600"/>
           </a:xfrm>
           <a:prstGeom prst="roundRect">
             <a:avLst/>
           </a:prstGeom>
           <a:solidFill>
-            <a:srgbClr val="FFFFFF"/>
+            <a:srgbClr val="EEF2FF"/>
           </a:solidFill>
           <a:ln>
             <a:solidFill>
@@ -4397,7 +4326,7 @@
           </a:fontRef>
         </p:style>
         <p:txBody>
-          <a:bodyPr rtlCol="0" anchor="ctr" wrap="square" lIns="228600"/>
+          <a:bodyPr rtlCol="0" anchor="ctr" wrap="square" lIns="274320"/>
           <a:lstStyle/>
           <a:p>
             <a:pPr algn="ctr">
@@ -4408,28 +4337,19 @@
               </a:defRPr>
             </a:pPr>
             <a:r>
-              <a:t>📊 Page 1 : Portefeuille</a:t>
-            </a:r>
-          </a:p>
-          <a:p>
-            <a:br/>
+              <a:t>1. Réajustement Tarifaire Global</a:t>
+            </a:r>
+          </a:p>
+          <a:p>
             <a:pPr>
-              <a:defRPr sz="1300">
+              <a:defRPr sz="1200">
                 <a:solidFill>
                   <a:srgbClr val="1E293B"/>
                 </a:solidFill>
               </a:defRPr>
             </a:pPr>
             <a:r>
-              <a:t>• KPIs stratégiques (Primes, Sinistres, S/P Global).</a:t>
-            </a:r>
-            <a:br/>
-            <a:r>
-              <a:t>• Distribution géographique et démographique.</a:t>
-            </a:r>
-            <a:br/>
-            <a:r>
-              <a:t>• Évolution temporelle des souscriptions.</a:t>
+              <a:t>Correction des tarifs sur les segments déficitaires (ex: 36-50 ans à 469% de S/P) pour ramener le ratio global sous le seuil d'équilibre de 70%[cite: 5, 7].</a:t>
             </a:r>
           </a:p>
         </p:txBody>
@@ -4442,14 +4362,14 @@
         </p:nvSpPr>
         <p:spPr>
           <a:xfrm>
-            <a:off x="4297680" y="1645920"/>
-            <a:ext cx="3291840" cy="4572000"/>
+            <a:off x="731520" y="3108960"/>
+            <a:ext cx="10728655" cy="1371600"/>
           </a:xfrm>
           <a:prstGeom prst="roundRect">
             <a:avLst/>
           </a:prstGeom>
           <a:solidFill>
-            <a:srgbClr val="FFFFFF"/>
+            <a:srgbClr val="EEF2FF"/>
           </a:solidFill>
           <a:ln>
             <a:solidFill>
@@ -4472,7 +4392,7 @@
           </a:fontRef>
         </p:style>
         <p:txBody>
-          <a:bodyPr rtlCol="0" anchor="ctr" wrap="square" lIns="228600"/>
+          <a:bodyPr rtlCol="0" anchor="ctr" wrap="square" lIns="274320"/>
           <a:lstStyle/>
           <a:p>
             <a:pPr algn="ctr">
@@ -4483,28 +4403,19 @@
               </a:defRPr>
             </a:pPr>
             <a:r>
-              <a:t>📈 Page 2 : Analyse Technique</a:t>
-            </a:r>
-          </a:p>
-          <a:p>
-            <a:br/>
+              <a:t>2. Programme Rétention &amp; Lutte Anti-Attrition</a:t>
+            </a:r>
+          </a:p>
+          <a:p>
             <a:pPr>
-              <a:defRPr sz="1300">
+              <a:defRPr sz="1200">
                 <a:solidFill>
                   <a:srgbClr val="1E293B"/>
                 </a:solidFill>
               </a:defRPr>
             </a:pPr>
             <a:r>
-              <a:t>• Courbe de Pareto (Concentration de la valeur Top 10%).</a:t>
-            </a:r>
-            <a:br/>
-            <a:r>
-              <a:t>• Matrice de rétention par cohorte.</a:t>
-            </a:r>
-            <a:br/>
-            <a:r>
-              <a:t>• Ratios S/P par tranche d'âge et garanties.</a:t>
+              <a:t>Mise en place d'actions ciblées pour enrayer le taux de résiliation élevé (32.5%) et fidéliser le portefeuille[cite: 5].</a:t>
             </a:r>
           </a:p>
         </p:txBody>
@@ -4517,14 +4428,14 @@
         </p:nvSpPr>
         <p:spPr>
           <a:xfrm>
-            <a:off x="7863840" y="1645920"/>
-            <a:ext cx="3291840" cy="4572000"/>
+            <a:off x="731520" y="4754880"/>
+            <a:ext cx="10728655" cy="1371600"/>
           </a:xfrm>
           <a:prstGeom prst="roundRect">
             <a:avLst/>
           </a:prstGeom>
           <a:solidFill>
-            <a:srgbClr val="FFFFFF"/>
+            <a:srgbClr val="EEF2FF"/>
           </a:solidFill>
           <a:ln>
             <a:solidFill>
@@ -4547,7 +4458,7 @@
           </a:fontRef>
         </p:style>
         <p:txBody>
-          <a:bodyPr rtlCol="0" anchor="ctr" wrap="square" lIns="228600"/>
+          <a:bodyPr rtlCol="0" anchor="ctr" wrap="square" lIns="274320"/>
           <a:lstStyle/>
           <a:p>
             <a:pPr algn="ctr">
@@ -4558,28 +4469,19 @@
               </a:defRPr>
             </a:pPr>
             <a:r>
-              <a:t>⚙️ Page 3 : Exploitation</a:t>
-            </a:r>
-          </a:p>
-          <a:p>
-            <a:br/>
+              <a:t>3. Fluidification des Sinistres Complexes</a:t>
+            </a:r>
+          </a:p>
+          <a:p>
             <a:pPr>
-              <a:defRPr sz="1300">
+              <a:defRPr sz="1200">
                 <a:solidFill>
                   <a:srgbClr val="1E293B"/>
                 </a:solidFill>
               </a:defRPr>
             </a:pPr>
             <a:r>
-              <a:t>• Fraîcheur des données dynamiques (J-0).</a:t>
-            </a:r>
-            <a:br/>
-            <a:r>
-              <a:t>• Suivi des volumes par couche (Raw/Prep/DWH).</a:t>
-            </a:r>
-            <a:br/>
-            <a:r>
-              <a:t>• Audit en direct des lignes en quarantaine.</a:t>
+              <a:t>Automatisation des expertises sur les garanties Vol et Incendie pour faire baisser le P90 de 25 jours[cite: 10].</a:t>
             </a:r>
           </a:p>
         </p:txBody>
@@ -4655,8 +4557,8 @@
         </p:nvSpPr>
         <p:spPr>
           <a:xfrm>
-            <a:off x="914400" y="1371600"/>
-            <a:ext cx="10362895" cy="4114800"/>
+            <a:off x="914400" y="1828800"/>
+            <a:ext cx="10362895" cy="3657600"/>
           </a:xfrm>
           <a:prstGeom prst="rect">
             <a:avLst/>
@@ -4677,7 +4579,7 @@
               </a:defRPr>
             </a:pPr>
             <a:r>
-              <a:t>CONCLUSION &amp; PERSPECTIVES</a:t>
+              <a:t>CONCLUSION</a:t>
             </a:r>
           </a:p>
           <a:p>
@@ -4689,33 +4591,20 @@
               </a:defRPr>
             </a:pPr>
             <a:r>
-              <a:t>Projet Intégrateur Boréal Assurances Finalisé avec Succès</a:t>
+              <a:t>Boréal Assurances dispose aujourd'hui d'une plateforme data robuste et d'un outil décisionnel clé en main pour redresser sa rentabilité et piloter son portefeuille avec précision.</a:t>
             </a:r>
           </a:p>
           <a:p>
             <a:br/>
             <a:pPr>
-              <a:defRPr sz="1600">
+              <a:defRPr sz="1500">
                 <a:solidFill>
                   <a:srgbClr val="E2E8F0"/>
                 </a:solidFill>
               </a:defRPr>
             </a:pPr>
             <a:r>
-              <a:t>Recommandations Métier :</a:t>
-            </a:r>
-            <a:br/>
-            <a:r>
-              <a:t>1. Réajustement tarifaire sur les segments à fort ratio S/P (jeunes conducteurs).</a:t>
-            </a:r>
-            <a:br/>
-            <a:r>
-              <a:t>2. Politiques de fidélisation ciblées sur le Top 10% des clients rentables (Pareto).</a:t>
-            </a:r>
-            <a:br/>
-            <a:br/>
-            <a:r>
-              <a:t>Merci de votre attention ! Place aux questions / réponses (10 min).</a:t>
+              <a:t> Merci de votre attention !</a:t>
             </a:r>
           </a:p>
         </p:txBody>
